--- a/slides/slide_07.pptx
+++ b/slides/slide_07.pptx
@@ -26,61 +26,38 @@
       <p:bold r:id="rId9"/>
     </p:embeddedFont>
     <p:embeddedFont>
-      <p:font typeface="Bebas Neue" panose="020B0606020202050201" pitchFamily="2" charset="0"/>
+      <p:font typeface="Hanken Grotesk" panose="020B0604020202020204" charset="0"/>
       <p:regular r:id="rId10"/>
-    </p:embeddedFont>
-    <p:embeddedFont>
-      <p:font typeface="DM Mono" panose="020B0509040201040103" pitchFamily="1" charset="0"/>
-      <p:regular r:id="rId11"/>
+      <p:bold r:id="rId11"/>
       <p:italic r:id="rId12"/>
-    </p:embeddedFont>
-    <p:embeddedFont>
-      <p:font typeface="Hanken Grotesk" panose="020B0604020202020204" charset="0"/>
-      <p:regular r:id="rId13"/>
-      <p:bold r:id="rId14"/>
-      <p:italic r:id="rId15"/>
-      <p:boldItalic r:id="rId16"/>
-    </p:embeddedFont>
-    <p:embeddedFont>
-      <p:font typeface="Open Sans" panose="020B0606030504020204" pitchFamily="2" charset="0"/>
-      <p:regular r:id="rId17"/>
-      <p:bold r:id="rId18"/>
-      <p:italic r:id="rId19"/>
-      <p:boldItalic r:id="rId20"/>
+      <p:boldItalic r:id="rId13"/>
     </p:embeddedFont>
     <p:embeddedFont>
       <p:font typeface="Raleway" pitchFamily="2" charset="0"/>
-      <p:regular r:id="rId21"/>
-      <p:bold r:id="rId22"/>
-      <p:italic r:id="rId23"/>
-      <p:boldItalic r:id="rId24"/>
+      <p:regular r:id="rId14"/>
+      <p:bold r:id="rId15"/>
+      <p:italic r:id="rId16"/>
+      <p:boldItalic r:id="rId17"/>
     </p:embeddedFont>
     <p:embeddedFont>
       <p:font typeface="Raleway Black" pitchFamily="2" charset="0"/>
-      <p:bold r:id="rId25"/>
-      <p:boldItalic r:id="rId26"/>
+      <p:bold r:id="rId18"/>
+      <p:boldItalic r:id="rId19"/>
     </p:embeddedFont>
     <p:embeddedFont>
       <p:font typeface="Raleway ExtraBold" pitchFamily="2" charset="0"/>
-      <p:bold r:id="rId27"/>
-      <p:boldItalic r:id="rId28"/>
+      <p:bold r:id="rId20"/>
+      <p:boldItalic r:id="rId21"/>
     </p:embeddedFont>
     <p:embeddedFont>
       <p:font typeface="Roboto Medium" panose="02000000000000000000" pitchFamily="2" charset="0"/>
-      <p:regular r:id="rId29"/>
-      <p:italic r:id="rId30"/>
+      <p:regular r:id="rId22"/>
+      <p:italic r:id="rId23"/>
     </p:embeddedFont>
     <p:embeddedFont>
       <p:font typeface="Roboto" panose="02000000000000000000" pitchFamily="2"/>
-      <p:bold r:id="rId31"/>
-      <p:boldItalic r:id="rId32"/>
-    </p:embeddedFont>
-    <p:embeddedFont>
-      <p:font typeface="Segoe UI" panose="020B0502040204020203" pitchFamily="2" charset="0"/>
-      <p:regular r:id="rId33"/>
-      <p:bold r:id="rId34"/>
-      <p:italic r:id="rId35"/>
-      <p:boldItalic r:id="rId36"/>
+      <p:bold r:id="rId24"/>
+      <p:boldItalic r:id="rId25"/>
     </p:embeddedFont>
   </p:embeddedFontLst>
   <p:custDataLst>
@@ -884,7 +861,7 @@
           <a:bodyPr/>
           <a:lstStyle/>
           <a:p>
-            <a:fld id="{00A7A977-C7CA-4A2F-92E9-40675117445E}" type="datetimeFigureOut">
+            <a:fld id="{2C239919-1052-4A7C-8895-72B74D2B2BCD}" type="datetimeFigureOut">
               <a:rPr lang="en-US" smtClean="0"/>
               <a:t>11/7/2009</a:t>
             </a:fld>
@@ -1048,7 +1025,7 @@
           <a:bodyPr/>
           <a:lstStyle/>
           <a:p>
-            <a:fld id="{248F19D2-576C-4618-968C-67772253FF9C}" type="datetimeFigureOut">
+            <a:fld id="{8B62425A-C678-40BA-9B95-E9DAA44C6822}" type="datetimeFigureOut">
               <a:rPr lang="en-US" smtClean="0"/>
               <a:t>11/7/2009</a:t>
             </a:fld>
@@ -1212,7 +1189,7 @@
           <a:bodyPr/>
           <a:lstStyle/>
           <a:p>
-            <a:fld id="{CBAAB380-5576-4026-9371-BE0714C16109}" type="datetimeFigureOut">
+            <a:fld id="{FAAE51E0-2C9B-4479-B4C6-F27F70BE6BF6}" type="datetimeFigureOut">
               <a:rPr lang="en-US" smtClean="0"/>
               <a:t>11/7/2009</a:t>
             </a:fld>
@@ -13117,7 +13094,7 @@
           <a:bodyPr/>
           <a:lstStyle/>
           <a:p>
-            <a:fld id="{6B81FF14-171F-4BAA-93B4-7867ABB4D097}" type="datetimeFigureOut">
+            <a:fld id="{9DC2423C-3EC4-46C6-AB90-911047A795E8}" type="datetimeFigureOut">
               <a:rPr lang="en-US" smtClean="0"/>
               <a:t>11/7/2009</a:t>
             </a:fld>
@@ -33218,7 +33195,7 @@
           <a:bodyPr/>
           <a:lstStyle/>
           <a:p>
-            <a:fld id="{A0C61D14-57D0-4B09-B175-F8D06867160F}" type="datetimeFigureOut">
+            <a:fld id="{D4FE6619-F0D6-47DA-B2D5-9F0E43C407A3}" type="datetimeFigureOut">
               <a:rPr lang="en-US" smtClean="0"/>
               <a:t>11/7/2009</a:t>
             </a:fld>
@@ -38865,7 +38842,7 @@
           <a:bodyPr/>
           <a:lstStyle/>
           <a:p>
-            <a:fld id="{DF5098B5-CD5E-4864-9723-2E60447DD092}" type="datetimeFigureOut">
+            <a:fld id="{522F7C86-4DEB-4598-85F7-AE72492898EA}" type="datetimeFigureOut">
               <a:rPr lang="en-US" smtClean="0"/>
               <a:t>11/7/2009</a:t>
             </a:fld>
@@ -39254,7 +39231,7 @@
           <a:bodyPr/>
           <a:lstStyle/>
           <a:p>
-            <a:fld id="{1ABD78B9-7CE0-4821-958D-C9836F6C5D71}" type="datetimeFigureOut">
+            <a:fld id="{44CCDBCD-D990-4AD5-9880-B272AC9496D7}" type="datetimeFigureOut">
               <a:rPr lang="en-US" smtClean="0"/>
               <a:t>11/7/2009</a:t>
             </a:fld>
@@ -39367,7 +39344,7 @@
           <a:bodyPr/>
           <a:lstStyle/>
           <a:p>
-            <a:fld id="{01996532-FD85-4976-B4BB-EA28DE04E818}" type="datetimeFigureOut">
+            <a:fld id="{3C889C0B-0305-4EEE-AA34-4FBE0F19F50A}" type="datetimeFigureOut">
               <a:rPr lang="en-US" smtClean="0"/>
               <a:t>11/7/2009</a:t>
             </a:fld>
@@ -39457,7 +39434,7 @@
           <a:bodyPr/>
           <a:lstStyle/>
           <a:p>
-            <a:fld id="{B2501F52-A3D3-4BCF-83D0-01C67F5EE890}" type="datetimeFigureOut">
+            <a:fld id="{041BDC8C-E6E1-46C2-BE7B-34F8B904C39D}" type="datetimeFigureOut">
               <a:rPr lang="en-US" smtClean="0"/>
               <a:t>11/7/2009</a:t>
             </a:fld>
@@ -39712,7 +39689,7 @@
           <a:bodyPr/>
           <a:lstStyle/>
           <a:p>
-            <a:fld id="{D4B2C3A7-BAE4-4541-AD1F-89D989C023A9}" type="datetimeFigureOut">
+            <a:fld id="{E897462E-63E3-41C5-BE48-515204FF8EB5}" type="datetimeFigureOut">
               <a:rPr lang="en-US" smtClean="0"/>
               <a:t>11/7/2009</a:t>
             </a:fld>
@@ -39944,7 +39921,7 @@
           <a:bodyPr/>
           <a:lstStyle/>
           <a:p>
-            <a:fld id="{9B342F26-1C15-4E2B-8CD1-E1E4D8FC8570}" type="datetimeFigureOut">
+            <a:fld id="{0D197F4C-3FA7-4748-A2FF-E24BE8953B72}" type="datetimeFigureOut">
               <a:rPr lang="en-US" smtClean="0"/>
               <a:t>11/7/2009</a:t>
             </a:fld>
@@ -41805,10 +41782,16 @@
           <a:p>
             <a:pPr marL="0" indent="0"/>
             <a:r>
-              <a:rPr lang="en" err="1"/>
+              <a:rPr lang="en" err="1">
+                <a:latin typeface="Arial"/>
+                <a:cs typeface="Arial"/>
+              </a:rPr>
               <a:t>Расчетное время доставки одной единицы товара</a:t>
             </a:r>
-            <a:endParaRPr lang="ru-RU" err="1"/>
+            <a:endParaRPr lang="ru-RU" err="1">
+              <a:latin typeface="Arial"/>
+              <a:cs typeface="Arial"/>
+            </a:endParaRPr>
           </a:p>
         </p:txBody>
       </p:sp>
@@ -41847,10 +41830,16 @@
               <a:buNone/>
             </a:pPr>
             <a:r>
-              <a:rPr lang="en"/>
+              <a:rPr lang="en" b="1">
+                <a:latin typeface="Arial"/>
+                <a:cs typeface="Arial"/>
+              </a:rPr>
               <a:t>9h 55m 23s</a:t>
             </a:r>
-            <a:endParaRPr/>
+            <a:endParaRPr b="1">
+              <a:latin typeface="Arial"/>
+              <a:cs typeface="Arial"/>
+            </a:endParaRPr>
           </a:p>
         </p:txBody>
       </p:sp>
@@ -41889,10 +41878,16 @@
               <a:buNone/>
             </a:pPr>
             <a:r>
-              <a:rPr lang="en"/>
+              <a:rPr lang="en" b="1">
+                <a:latin typeface="Arial"/>
+                <a:cs typeface="Arial"/>
+              </a:rPr>
               <a:t>333,000</a:t>
             </a:r>
-            <a:endParaRPr/>
+            <a:endParaRPr b="1">
+              <a:latin typeface="Arial"/>
+              <a:cs typeface="Arial"/>
+            </a:endParaRPr>
           </a:p>
         </p:txBody>
       </p:sp>
@@ -41923,10 +41918,16 @@
           <a:p>
             <a:pPr marL="0" indent="0"/>
             <a:r>
-              <a:rPr lang="en"/>
+              <a:rPr lang="en">
+                <a:latin typeface="Arial"/>
+                <a:cs typeface="Arial"/>
+              </a:rPr>
               <a:t>Пользователи купили наш продукт</a:t>
             </a:r>
-            <a:endParaRPr lang="ru-RU" err="1"/>
+            <a:endParaRPr lang="ru-RU" err="1">
+              <a:latin typeface="Arial"/>
+              <a:cs typeface="Arial"/>
+            </a:endParaRPr>
           </a:p>
         </p:txBody>
       </p:sp>
@@ -41965,10 +41966,16 @@
               <a:buNone/>
             </a:pPr>
             <a:r>
-              <a:rPr lang="en"/>
+              <a:rPr lang="en" b="1">
+                <a:latin typeface="Arial"/>
+                <a:cs typeface="Arial"/>
+              </a:rPr>
               <a:t>386,000 km</a:t>
             </a:r>
-            <a:endParaRPr/>
+            <a:endParaRPr b="1">
+              <a:latin typeface="Arial"/>
+              <a:cs typeface="Arial"/>
+            </a:endParaRPr>
           </a:p>
         </p:txBody>
       </p:sp>
@@ -41999,10 +42006,16 @@
           <a:p>
             <a:pPr marL="0" indent="0"/>
             <a:r>
-              <a:rPr lang="en" err="1"/>
+              <a:rPr lang="en" err="1">
+                <a:latin typeface="Arial"/>
+                <a:cs typeface="Arial"/>
+              </a:rPr>
               <a:t>Среднее расстояние, пройденное командой логистов</a:t>
             </a:r>
-            <a:endParaRPr lang="ru-RU" err="1"/>
+            <a:endParaRPr lang="ru-RU">
+              <a:latin typeface="Arial"/>
+              <a:cs typeface="Arial"/>
+            </a:endParaRPr>
           </a:p>
           <a:p>
             <a:pPr marL="0" indent="0"/>

--- a/slides/slide_07.pptx
+++ b/slides/slide_07.pptx
@@ -861,7 +861,7 @@
           <a:bodyPr/>
           <a:lstStyle/>
           <a:p>
-            <a:fld id="{2C239919-1052-4A7C-8895-72B74D2B2BCD}" type="datetimeFigureOut">
+            <a:fld id="{46E41BE4-968E-4F95-846F-E82FE100BF80}" type="datetimeFigureOut">
               <a:rPr lang="en-US" smtClean="0"/>
               <a:t>11/7/2009</a:t>
             </a:fld>
@@ -1025,7 +1025,7 @@
           <a:bodyPr/>
           <a:lstStyle/>
           <a:p>
-            <a:fld id="{8B62425A-C678-40BA-9B95-E9DAA44C6822}" type="datetimeFigureOut">
+            <a:fld id="{E6E0B76E-45FE-4518-8FC5-C9BA226CFECE}" type="datetimeFigureOut">
               <a:rPr lang="en-US" smtClean="0"/>
               <a:t>11/7/2009</a:t>
             </a:fld>
@@ -1189,7 +1189,7 @@
           <a:bodyPr/>
           <a:lstStyle/>
           <a:p>
-            <a:fld id="{FAAE51E0-2C9B-4479-B4C6-F27F70BE6BF6}" type="datetimeFigureOut">
+            <a:fld id="{973EA6CD-1B93-4AFC-95DD-9952543416E9}" type="datetimeFigureOut">
               <a:rPr lang="en-US" smtClean="0"/>
               <a:t>11/7/2009</a:t>
             </a:fld>
@@ -13094,7 +13094,7 @@
           <a:bodyPr/>
           <a:lstStyle/>
           <a:p>
-            <a:fld id="{9DC2423C-3EC4-46C6-AB90-911047A795E8}" type="datetimeFigureOut">
+            <a:fld id="{1FE11424-F06D-4CB8-AE9F-D1BEE81035F6}" type="datetimeFigureOut">
               <a:rPr lang="en-US" smtClean="0"/>
               <a:t>11/7/2009</a:t>
             </a:fld>
@@ -33195,7 +33195,7 @@
           <a:bodyPr/>
           <a:lstStyle/>
           <a:p>
-            <a:fld id="{D4FE6619-F0D6-47DA-B2D5-9F0E43C407A3}" type="datetimeFigureOut">
+            <a:fld id="{2DCA5E5F-2972-4A00-BF30-B03D03EE4DF7}" type="datetimeFigureOut">
               <a:rPr lang="en-US" smtClean="0"/>
               <a:t>11/7/2009</a:t>
             </a:fld>
@@ -38842,7 +38842,7 @@
           <a:bodyPr/>
           <a:lstStyle/>
           <a:p>
-            <a:fld id="{522F7C86-4DEB-4598-85F7-AE72492898EA}" type="datetimeFigureOut">
+            <a:fld id="{D5136C5F-69AC-4858-AC96-649CA76CEC6D}" type="datetimeFigureOut">
               <a:rPr lang="en-US" smtClean="0"/>
               <a:t>11/7/2009</a:t>
             </a:fld>
@@ -39231,7 +39231,7 @@
           <a:bodyPr/>
           <a:lstStyle/>
           <a:p>
-            <a:fld id="{44CCDBCD-D990-4AD5-9880-B272AC9496D7}" type="datetimeFigureOut">
+            <a:fld id="{46251288-4645-46BF-8281-FCE9970450F9}" type="datetimeFigureOut">
               <a:rPr lang="en-US" smtClean="0"/>
               <a:t>11/7/2009</a:t>
             </a:fld>
@@ -39344,7 +39344,7 @@
           <a:bodyPr/>
           <a:lstStyle/>
           <a:p>
-            <a:fld id="{3C889C0B-0305-4EEE-AA34-4FBE0F19F50A}" type="datetimeFigureOut">
+            <a:fld id="{DE3C0713-F3D0-4250-8B9B-8993F9F2E2F5}" type="datetimeFigureOut">
               <a:rPr lang="en-US" smtClean="0"/>
               <a:t>11/7/2009</a:t>
             </a:fld>
@@ -39434,7 +39434,7 @@
           <a:bodyPr/>
           <a:lstStyle/>
           <a:p>
-            <a:fld id="{041BDC8C-E6E1-46C2-BE7B-34F8B904C39D}" type="datetimeFigureOut">
+            <a:fld id="{72739E8C-24E6-4D67-AE2D-69121C519420}" type="datetimeFigureOut">
               <a:rPr lang="en-US" smtClean="0"/>
               <a:t>11/7/2009</a:t>
             </a:fld>
@@ -39689,7 +39689,7 @@
           <a:bodyPr/>
           <a:lstStyle/>
           <a:p>
-            <a:fld id="{E897462E-63E3-41C5-BE48-515204FF8EB5}" type="datetimeFigureOut">
+            <a:fld id="{6765A43A-7358-41D9-9625-3A3DFCF3CE52}" type="datetimeFigureOut">
               <a:rPr lang="en-US" smtClean="0"/>
               <a:t>11/7/2009</a:t>
             </a:fld>
@@ -39921,7 +39921,7 @@
           <a:bodyPr/>
           <a:lstStyle/>
           <a:p>
-            <a:fld id="{0D197F4C-3FA7-4748-A2FF-E24BE8953B72}" type="datetimeFigureOut">
+            <a:fld id="{37909DF8-8574-4F75-A4E1-23B6C1CF4309}" type="datetimeFigureOut">
               <a:rPr lang="en-US" smtClean="0"/>
               <a:t>11/7/2009</a:t>
             </a:fld>
